--- a/Poster/Poster_Final_Project.pptx
+++ b/Poster/Poster_Final_Project.pptx
@@ -14488,8 +14488,8 @@
         </p:nvSpPr>
         <p:spPr>
           <a:xfrm>
-            <a:off x="817717" y="8016643"/>
-            <a:ext cx="9561421" cy="4339627"/>
+            <a:off x="817718" y="7126470"/>
+            <a:ext cx="9037142" cy="4652988"/>
           </a:xfrm>
         </p:spPr>
         <p:txBody>
@@ -14551,7 +14551,7 @@
         </p:nvSpPr>
         <p:spPr>
           <a:xfrm>
-            <a:off x="509578" y="6878163"/>
+            <a:off x="450435" y="5897344"/>
             <a:ext cx="10048875" cy="754045"/>
           </a:xfrm>
         </p:spPr>
@@ -14581,7 +14581,7 @@
         </p:nvSpPr>
         <p:spPr>
           <a:xfrm>
-            <a:off x="817717" y="17692234"/>
+            <a:off x="817717" y="17496744"/>
             <a:ext cx="8763595" cy="615545"/>
           </a:xfrm>
         </p:spPr>
@@ -14772,7 +14772,7 @@
         </p:nvSpPr>
         <p:spPr>
           <a:xfrm>
-            <a:off x="349066" y="555254"/>
+            <a:off x="543157" y="750721"/>
             <a:ext cx="42901013" cy="2277387"/>
           </a:xfrm>
         </p:spPr>
@@ -14783,7 +14783,14 @@
           <a:lstStyle/>
           <a:p>
             <a:r>
-              <a:rPr lang="en-IE" dirty="0"/>
+              <a:rPr lang="en-IE" b="1" dirty="0">
+                <a:solidFill>
+                  <a:schemeClr val="tx2">
+                    <a:lumMod val="20000"/>
+                    <a:lumOff val="80000"/>
+                  </a:schemeClr>
+                </a:solidFill>
+              </a:rPr>
               <a:t>AI Bias Auditing Framework for Labour Market Disparity Analysis</a:t>
             </a:r>
           </a:p>
@@ -15124,7 +15131,7 @@
         </p:nvSpPr>
         <p:spPr>
           <a:xfrm>
-            <a:off x="520682" y="12579007"/>
+            <a:off x="266634" y="12053844"/>
             <a:ext cx="10026754" cy="754045"/>
           </a:xfrm>
         </p:spPr>

--- a/Poster/Poster_Final_Project.pptx
+++ b/Poster/Poster_Final_Project.pptx
@@ -14726,7 +14726,7 @@
         </p:nvSpPr>
         <p:spPr>
           <a:xfrm>
-            <a:off x="5534015" y="3258481"/>
+            <a:off x="5715156" y="2955484"/>
             <a:ext cx="31998968" cy="1280160"/>
           </a:xfrm>
         </p:spPr>
@@ -14772,7 +14772,7 @@
         </p:nvSpPr>
         <p:spPr>
           <a:xfrm>
-            <a:off x="543157" y="750721"/>
+            <a:off x="478573" y="415686"/>
             <a:ext cx="42901013" cy="2277387"/>
           </a:xfrm>
         </p:spPr>
@@ -18460,6 +18460,48 @@
               <a:t>Top features: AGEP 51.9% · SCHL 20.3% · DIS 13.2% · SEX 2.9% · RAC1P 1.5%</a:t>
             </a:r>
             <a:endParaRPr lang="en-IE" sz="1600" b="1" dirty="0"/>
+          </a:p>
+        </p:txBody>
+      </p:sp>
+      <p:sp>
+        <p:nvSpPr>
+          <p:cNvPr id="4116" name="CuadroTexto 4115">
+            <a:extLst>
+              <a:ext uri="{FF2B5EF4-FFF2-40B4-BE49-F238E27FC236}">
+                <a16:creationId xmlns:a16="http://schemas.microsoft.com/office/drawing/2014/main" id="{CB1DA072-AB9C-2261-3212-80FA643EE900}"/>
+              </a:ext>
+            </a:extLst>
+          </p:cNvPr>
+          <p:cNvSpPr txBox="1"/>
+          <p:nvPr/>
+        </p:nvSpPr>
+        <p:spPr>
+          <a:xfrm>
+            <a:off x="15089953" y="3839378"/>
+            <a:ext cx="18561418" cy="707886"/>
+          </a:xfrm>
+          <a:prstGeom prst="rect">
+            <a:avLst/>
+          </a:prstGeom>
+          <a:noFill/>
+        </p:spPr>
+        <p:txBody>
+          <a:bodyPr wrap="square" rtlCol="0">
+            <a:spAutoFit/>
+          </a:bodyPr>
+          <a:lstStyle/>
+          <a:p>
+            <a:r>
+              <a:rPr lang="en-IE" sz="4000" dirty="0">
+                <a:solidFill>
+                  <a:schemeClr val="tx2">
+                    <a:lumMod val="20000"/>
+                    <a:lumOff val="80000"/>
+                  </a:schemeClr>
+                </a:solidFill>
+              </a:rPr>
+              <a:t>GITHUB : https://github.com/2022475/ca2-90-2022475.git</a:t>
+            </a:r>
           </a:p>
         </p:txBody>
       </p:sp>
